--- a/activity/M04A04/M04A04.pptx
+++ b/activity/M04A04/M04A04.pptx
@@ -142,6 +142,30 @@
 
 <file path=ppt/changesInfos/changesInfo1.xml><?xml version="1.0" encoding="utf-8"?>
 <pc:chgInfo xmlns:a="http://schemas.openxmlformats.org/drawingml/2006/main" xmlns:r="http://schemas.openxmlformats.org/officeDocument/2006/relationships" xmlns:ac="http://schemas.microsoft.com/office/drawing/2013/main/command" xmlns:pc="http://schemas.microsoft.com/office/powerpoint/2013/main/command">
+  <pc:docChgLst>
+    <pc:chgData name="WILLIAM RICARDO AGUILAR PIÑA" userId="25538c52-b196-49fc-9025-2dd86a54f18a" providerId="ADAL" clId="{EA8BE8A2-B726-4C62-8DC3-571AF94CF806}"/>
+    <pc:docChg chg="custSel modSld">
+      <pc:chgData name="WILLIAM RICARDO AGUILAR PIÑA" userId="25538c52-b196-49fc-9025-2dd86a54f18a" providerId="ADAL" clId="{EA8BE8A2-B726-4C62-8DC3-571AF94CF806}" dt="2022-11-26T13:51:45.674" v="95" actId="20577"/>
+      <pc:docMkLst>
+        <pc:docMk/>
+      </pc:docMkLst>
+      <pc:sldChg chg="modSp mod">
+        <pc:chgData name="WILLIAM RICARDO AGUILAR PIÑA" userId="25538c52-b196-49fc-9025-2dd86a54f18a" providerId="ADAL" clId="{EA8BE8A2-B726-4C62-8DC3-571AF94CF806}" dt="2022-11-26T13:51:45.674" v="95" actId="20577"/>
+        <pc:sldMkLst>
+          <pc:docMk/>
+          <pc:sldMk cId="3215560426" sldId="325"/>
+        </pc:sldMkLst>
+        <pc:spChg chg="mod">
+          <ac:chgData name="WILLIAM RICARDO AGUILAR PIÑA" userId="25538c52-b196-49fc-9025-2dd86a54f18a" providerId="ADAL" clId="{EA8BE8A2-B726-4C62-8DC3-571AF94CF806}" dt="2022-11-26T13:51:45.674" v="95" actId="20577"/>
+          <ac:spMkLst>
+            <pc:docMk/>
+            <pc:sldMk cId="3215560426" sldId="325"/>
+            <ac:spMk id="8" creationId="{00000000-0000-0000-0000-000000000000}"/>
+          </ac:spMkLst>
+        </pc:spChg>
+      </pc:sldChg>
+    </pc:docChg>
+  </pc:docChgLst>
   <pc:docChgLst>
     <pc:chgData name="WILLIAM RICARDO AGUILAR PIÑA" userId="25538c52-b196-49fc-9025-2dd86a54f18a" providerId="ADAL" clId="{7B14A920-D7B9-480F-B272-D017A32C3019}"/>
     <pc:docChg chg="custSel addSld delSld modSld">
@@ -727,30 +751,6 @@
     </pc:docChg>
   </pc:docChgLst>
   <pc:docChgLst>
-    <pc:chgData name="WILLIAM RICARDO AGUILAR PIÑA" userId="25538c52-b196-49fc-9025-2dd86a54f18a" providerId="ADAL" clId="{164FE1CF-D30A-44C6-9CDC-D2525FCD3A16}"/>
-    <pc:docChg chg="modSld">
-      <pc:chgData name="WILLIAM RICARDO AGUILAR PIÑA" userId="25538c52-b196-49fc-9025-2dd86a54f18a" providerId="ADAL" clId="{164FE1CF-D30A-44C6-9CDC-D2525FCD3A16}" dt="2023-12-01T13:54:21.753" v="2" actId="20577"/>
-      <pc:docMkLst>
-        <pc:docMk/>
-      </pc:docMkLst>
-      <pc:sldChg chg="modSp mod">
-        <pc:chgData name="WILLIAM RICARDO AGUILAR PIÑA" userId="25538c52-b196-49fc-9025-2dd86a54f18a" providerId="ADAL" clId="{164FE1CF-D30A-44C6-9CDC-D2525FCD3A16}" dt="2023-12-01T13:54:21.753" v="2" actId="20577"/>
-        <pc:sldMkLst>
-          <pc:docMk/>
-          <pc:sldMk cId="3215560426" sldId="325"/>
-        </pc:sldMkLst>
-        <pc:spChg chg="mod">
-          <ac:chgData name="WILLIAM RICARDO AGUILAR PIÑA" userId="25538c52-b196-49fc-9025-2dd86a54f18a" providerId="ADAL" clId="{164FE1CF-D30A-44C6-9CDC-D2525FCD3A16}" dt="2023-12-01T13:54:21.753" v="2" actId="20577"/>
-          <ac:spMkLst>
-            <pc:docMk/>
-            <pc:sldMk cId="3215560426" sldId="325"/>
-            <ac:spMk id="8" creationId="{00000000-0000-0000-0000-000000000000}"/>
-          </ac:spMkLst>
-        </pc:spChg>
-      </pc:sldChg>
-    </pc:docChg>
-  </pc:docChgLst>
-  <pc:docChgLst>
     <pc:chgData name="WILLIAM RICARDO AGUILAR PIÑA" userId="25538c52-b196-49fc-9025-2dd86a54f18a" providerId="ADAL" clId="{51AE2F63-1A27-43EF-B5E3-319C3DEB3A1F}"/>
     <pc:docChg chg="undo custSel addSld delSld modSld sldOrd">
       <pc:chgData name="WILLIAM RICARDO AGUILAR PIÑA" userId="25538c52-b196-49fc-9025-2dd86a54f18a" providerId="ADAL" clId="{51AE2F63-1A27-43EF-B5E3-319C3DEB3A1F}" dt="2018-11-14T15:23:53.489" v="2563" actId="6549"/>
@@ -1120,20 +1120,20 @@
     </pc:docChg>
   </pc:docChgLst>
   <pc:docChgLst>
-    <pc:chgData name="WILLIAM RICARDO AGUILAR PIÑA" userId="25538c52-b196-49fc-9025-2dd86a54f18a" providerId="ADAL" clId="{EA8BE8A2-B726-4C62-8DC3-571AF94CF806}"/>
-    <pc:docChg chg="custSel modSld">
-      <pc:chgData name="WILLIAM RICARDO AGUILAR PIÑA" userId="25538c52-b196-49fc-9025-2dd86a54f18a" providerId="ADAL" clId="{EA8BE8A2-B726-4C62-8DC3-571AF94CF806}" dt="2022-11-26T13:51:45.674" v="95" actId="20577"/>
+    <pc:chgData name="WILLIAM RICARDO AGUILAR PIÑA" userId="25538c52-b196-49fc-9025-2dd86a54f18a" providerId="ADAL" clId="{164FE1CF-D30A-44C6-9CDC-D2525FCD3A16}"/>
+    <pc:docChg chg="modSld">
+      <pc:chgData name="WILLIAM RICARDO AGUILAR PIÑA" userId="25538c52-b196-49fc-9025-2dd86a54f18a" providerId="ADAL" clId="{164FE1CF-D30A-44C6-9CDC-D2525FCD3A16}" dt="2023-12-01T13:54:21.753" v="2" actId="20577"/>
       <pc:docMkLst>
         <pc:docMk/>
       </pc:docMkLst>
       <pc:sldChg chg="modSp mod">
-        <pc:chgData name="WILLIAM RICARDO AGUILAR PIÑA" userId="25538c52-b196-49fc-9025-2dd86a54f18a" providerId="ADAL" clId="{EA8BE8A2-B726-4C62-8DC3-571AF94CF806}" dt="2022-11-26T13:51:45.674" v="95" actId="20577"/>
+        <pc:chgData name="WILLIAM RICARDO AGUILAR PIÑA" userId="25538c52-b196-49fc-9025-2dd86a54f18a" providerId="ADAL" clId="{164FE1CF-D30A-44C6-9CDC-D2525FCD3A16}" dt="2023-12-01T13:54:21.753" v="2" actId="20577"/>
         <pc:sldMkLst>
           <pc:docMk/>
           <pc:sldMk cId="3215560426" sldId="325"/>
         </pc:sldMkLst>
         <pc:spChg chg="mod">
-          <ac:chgData name="WILLIAM RICARDO AGUILAR PIÑA" userId="25538c52-b196-49fc-9025-2dd86a54f18a" providerId="ADAL" clId="{EA8BE8A2-B726-4C62-8DC3-571AF94CF806}" dt="2022-11-26T13:51:45.674" v="95" actId="20577"/>
+          <ac:chgData name="WILLIAM RICARDO AGUILAR PIÑA" userId="25538c52-b196-49fc-9025-2dd86a54f18a" providerId="ADAL" clId="{164FE1CF-D30A-44C6-9CDC-D2525FCD3A16}" dt="2023-12-01T13:54:21.753" v="2" actId="20577"/>
           <ac:spMkLst>
             <pc:docMk/>
             <pc:sldMk cId="3215560426" sldId="325"/>
@@ -1229,7 +1229,7 @@
             <a:fld id="{53CE91DE-ABC6-4D22-89A0-1765B629FB43}" type="datetimeFigureOut">
               <a:rPr lang="es-CO" smtClean="0"/>
               <a:pPr/>
-              <a:t>01/12/2023</a:t>
+              <a:t>21/11/2025</a:t>
             </a:fld>
             <a:endParaRPr lang="es-CO"/>
           </a:p>
@@ -2787,7 +2787,7 @@
             <a:fld id="{43DF08CB-A55A-40B1-AEFD-F19B3CFD19B5}" type="datetimeFigureOut">
               <a:rPr lang="es-CO" smtClean="0"/>
               <a:pPr/>
-              <a:t>01/12/2023</a:t>
+              <a:t>21/11/2025</a:t>
             </a:fld>
             <a:endParaRPr lang="es-CO"/>
           </a:p>
@@ -2954,7 +2954,7 @@
             <a:fld id="{43DF08CB-A55A-40B1-AEFD-F19B3CFD19B5}" type="datetimeFigureOut">
               <a:rPr lang="es-CO" smtClean="0"/>
               <a:pPr/>
-              <a:t>01/12/2023</a:t>
+              <a:t>21/11/2025</a:t>
             </a:fld>
             <a:endParaRPr lang="es-CO"/>
           </a:p>
@@ -3131,7 +3131,7 @@
             <a:fld id="{43DF08CB-A55A-40B1-AEFD-F19B3CFD19B5}" type="datetimeFigureOut">
               <a:rPr lang="es-CO" smtClean="0"/>
               <a:pPr/>
-              <a:t>01/12/2023</a:t>
+              <a:t>21/11/2025</a:t>
             </a:fld>
             <a:endParaRPr lang="es-CO"/>
           </a:p>
@@ -3298,7 +3298,7 @@
             <a:fld id="{43DF08CB-A55A-40B1-AEFD-F19B3CFD19B5}" type="datetimeFigureOut">
               <a:rPr lang="es-CO" smtClean="0"/>
               <a:pPr/>
-              <a:t>01/12/2023</a:t>
+              <a:t>21/11/2025</a:t>
             </a:fld>
             <a:endParaRPr lang="es-CO"/>
           </a:p>
@@ -3541,7 +3541,7 @@
             <a:fld id="{43DF08CB-A55A-40B1-AEFD-F19B3CFD19B5}" type="datetimeFigureOut">
               <a:rPr lang="es-CO" smtClean="0"/>
               <a:pPr/>
-              <a:t>01/12/2023</a:t>
+              <a:t>21/11/2025</a:t>
             </a:fld>
             <a:endParaRPr lang="es-CO"/>
           </a:p>
@@ -3826,7 +3826,7 @@
             <a:fld id="{43DF08CB-A55A-40B1-AEFD-F19B3CFD19B5}" type="datetimeFigureOut">
               <a:rPr lang="es-CO" smtClean="0"/>
               <a:pPr/>
-              <a:t>01/12/2023</a:t>
+              <a:t>21/11/2025</a:t>
             </a:fld>
             <a:endParaRPr lang="es-CO"/>
           </a:p>
@@ -4245,7 +4245,7 @@
             <a:fld id="{43DF08CB-A55A-40B1-AEFD-F19B3CFD19B5}" type="datetimeFigureOut">
               <a:rPr lang="es-CO" smtClean="0"/>
               <a:pPr/>
-              <a:t>01/12/2023</a:t>
+              <a:t>21/11/2025</a:t>
             </a:fld>
             <a:endParaRPr lang="es-CO"/>
           </a:p>
@@ -4360,7 +4360,7 @@
             <a:fld id="{43DF08CB-A55A-40B1-AEFD-F19B3CFD19B5}" type="datetimeFigureOut">
               <a:rPr lang="es-CO" smtClean="0"/>
               <a:pPr/>
-              <a:t>01/12/2023</a:t>
+              <a:t>21/11/2025</a:t>
             </a:fld>
             <a:endParaRPr lang="es-CO"/>
           </a:p>
@@ -4452,7 +4452,7 @@
             <a:fld id="{43DF08CB-A55A-40B1-AEFD-F19B3CFD19B5}" type="datetimeFigureOut">
               <a:rPr lang="es-CO" smtClean="0"/>
               <a:pPr/>
-              <a:t>01/12/2023</a:t>
+              <a:t>21/11/2025</a:t>
             </a:fld>
             <a:endParaRPr lang="es-CO"/>
           </a:p>
@@ -4726,7 +4726,7 @@
             <a:fld id="{43DF08CB-A55A-40B1-AEFD-F19B3CFD19B5}" type="datetimeFigureOut">
               <a:rPr lang="es-CO" smtClean="0"/>
               <a:pPr/>
-              <a:t>01/12/2023</a:t>
+              <a:t>21/11/2025</a:t>
             </a:fld>
             <a:endParaRPr lang="es-CO"/>
           </a:p>
@@ -4976,7 +4976,7 @@
             <a:fld id="{43DF08CB-A55A-40B1-AEFD-F19B3CFD19B5}" type="datetimeFigureOut">
               <a:rPr lang="es-CO" smtClean="0"/>
               <a:pPr/>
-              <a:t>01/12/2023</a:t>
+              <a:t>21/11/2025</a:t>
             </a:fld>
             <a:endParaRPr lang="es-CO"/>
           </a:p>
@@ -5189,7 +5189,7 @@
             <a:fld id="{43DF08CB-A55A-40B1-AEFD-F19B3CFD19B5}" type="datetimeFigureOut">
               <a:rPr lang="es-CO" smtClean="0"/>
               <a:pPr/>
-              <a:t>01/12/2023</a:t>
+              <a:t>21/11/2025</a:t>
             </a:fld>
             <a:endParaRPr lang="es-CO"/>
           </a:p>
